--- a/Slides/Week01/17：回到Supervised Learning.pptx
+++ b/Slides/Week01/17：回到Supervised Learning.pptx
@@ -211,7 +211,7 @@
           <a:p>
             <a:fld id="{2FB00B21-9968-43C6-BED8-452C9F4ABD3A}" type="datetimeFigureOut">
               <a:rPr lang="zh-TW" altLang="en-US" smtClean="0"/>
-              <a:t>2024/3/21</a:t>
+              <a:t>2024/12/4</a:t>
             </a:fld>
             <a:endParaRPr lang="zh-TW" altLang="en-US"/>
           </a:p>
@@ -2410,7 +2410,7 @@
                 </a:solidFill>
               </a:rPr>
               <a:pPr/>
-              <a:t>3/21/2024</a:t>
+              <a:t>12/4/2024</a:t>
             </a:fld>
             <a:endParaRPr kumimoji="0" lang="en-US" dirty="0"/>
           </a:p>
@@ -2806,7 +2806,7 @@
                 </a:solidFill>
               </a:rPr>
               <a:pPr/>
-              <a:t>3/21/2024</a:t>
+              <a:t>12/4/2024</a:t>
             </a:fld>
             <a:endParaRPr kumimoji="0" lang="en-US" dirty="0"/>
           </a:p>
@@ -3146,7 +3146,7 @@
                 </a:solidFill>
               </a:rPr>
               <a:pPr/>
-              <a:t>3/21/2024</a:t>
+              <a:t>12/4/2024</a:t>
             </a:fld>
             <a:endParaRPr kumimoji="0" lang="en-US" dirty="0"/>
           </a:p>
@@ -3727,7 +3727,7 @@
                 </a:solidFill>
               </a:rPr>
               <a:pPr/>
-              <a:t>3/21/2024</a:t>
+              <a:t>12/4/2024</a:t>
             </a:fld>
             <a:endParaRPr kumimoji="0" lang="en-US" dirty="0"/>
           </a:p>
@@ -4296,7 +4296,7 @@
                 </a:solidFill>
               </a:rPr>
               <a:pPr/>
-              <a:t>3/21/2024</a:t>
+              <a:t>12/4/2024</a:t>
             </a:fld>
             <a:endParaRPr kumimoji="0" lang="en-US" dirty="0"/>
           </a:p>
@@ -4760,7 +4760,7 @@
                 </a:solidFill>
               </a:rPr>
               <a:pPr/>
-              <a:t>3/21/2024</a:t>
+              <a:t>12/4/2024</a:t>
             </a:fld>
             <a:endParaRPr kumimoji="0" lang="en-US" dirty="0"/>
           </a:p>
@@ -5189,7 +5189,7 @@
                 </a:solidFill>
               </a:rPr>
               <a:pPr/>
-              <a:t>3/21/2024</a:t>
+              <a:t>12/4/2024</a:t>
             </a:fld>
             <a:endParaRPr kumimoji="0" lang="en-US" dirty="0"/>
           </a:p>
@@ -5698,7 +5698,7 @@
                 </a:solidFill>
               </a:rPr>
               <a:pPr/>
-              <a:t>3/21/2024</a:t>
+              <a:t>12/4/2024</a:t>
             </a:fld>
             <a:endParaRPr kumimoji="0" lang="en-US" dirty="0"/>
           </a:p>
@@ -6207,7 +6207,7 @@
                 </a:solidFill>
               </a:rPr>
               <a:pPr/>
-              <a:t>3/21/2024</a:t>
+              <a:t>12/4/2024</a:t>
             </a:fld>
             <a:endParaRPr kumimoji="0" lang="en-US" dirty="0"/>
           </a:p>
@@ -6428,7 +6428,7 @@
                 </a:solidFill>
               </a:rPr>
               <a:pPr/>
-              <a:t>3/21/2024</a:t>
+              <a:t>12/4/2024</a:t>
             </a:fld>
             <a:endParaRPr kumimoji="0" lang="en-US" dirty="0"/>
           </a:p>
@@ -6761,7 +6761,7 @@
                 </a:solidFill>
               </a:rPr>
               <a:pPr/>
-              <a:t>3/21/2024</a:t>
+              <a:t>12/4/2024</a:t>
             </a:fld>
             <a:endParaRPr kumimoji="0" lang="en-US" dirty="0"/>
           </a:p>
@@ -6992,7 +6992,7 @@
                 </a:solidFill>
               </a:rPr>
               <a:pPr/>
-              <a:t>3/21/2024</a:t>
+              <a:t>12/4/2024</a:t>
             </a:fld>
             <a:endParaRPr kumimoji="0" lang="en-US" dirty="0"/>
           </a:p>
@@ -7216,7 +7216,7 @@
                 </a:solidFill>
               </a:rPr>
               <a:pPr/>
-              <a:t>3/21/2024</a:t>
+              <a:t>12/4/2024</a:t>
             </a:fld>
             <a:endParaRPr kumimoji="0" lang="en-US" dirty="0"/>
           </a:p>
@@ -7397,7 +7397,7 @@
             <a:fld id="{ACB2EC6F-6501-4E04-BD6C-A8A6CABB2C5B}" type="datetimeFigureOut">
               <a:rPr kumimoji="0" lang="en-US" smtClean="0"/>
               <a:pPr/>
-              <a:t>3/21/2024</a:t>
+              <a:t>12/4/2024</a:t>
             </a:fld>
             <a:endParaRPr kumimoji="0" lang="en-US" dirty="0"/>
           </a:p>
@@ -8275,7 +8275,7 @@
                 </a:solidFill>
               </a:rPr>
               <a:pPr/>
-              <a:t>3/21/2024</a:t>
+              <a:t>12/4/2024</a:t>
             </a:fld>
             <a:endParaRPr kumimoji="0" lang="en-US" dirty="0"/>
           </a:p>
@@ -8757,7 +8757,7 @@
                 </a:solidFill>
               </a:rPr>
               <a:pPr/>
-              <a:t>3/21/2024</a:t>
+              <a:t>12/4/2024</a:t>
             </a:fld>
             <a:endParaRPr kumimoji="0" lang="en-US" dirty="0"/>
           </a:p>
@@ -9114,7 +9114,7 @@
                 </a:solidFill>
               </a:rPr>
               <a:pPr/>
-              <a:t>3/21/2024</a:t>
+              <a:t>12/4/2024</a:t>
             </a:fld>
             <a:endParaRPr kumimoji="0" lang="en-US" dirty="0"/>
           </a:p>
@@ -9477,7 +9477,7 @@
                 </a:solidFill>
               </a:rPr>
               <a:pPr/>
-              <a:t>3/21/2024</a:t>
+              <a:t>12/4/2024</a:t>
             </a:fld>
             <a:endParaRPr kumimoji="0" lang="en-US" dirty="0"/>
           </a:p>
@@ -9787,7 +9787,7 @@
                 </a:solidFill>
               </a:rPr>
               <a:pPr/>
-              <a:t>3/21/2024</a:t>
+              <a:t>12/4/2024</a:t>
             </a:fld>
             <a:endParaRPr kumimoji="0" lang="en-US" dirty="0"/>
           </a:p>
@@ -10268,7 +10268,7 @@
                 </a:solidFill>
               </a:rPr>
               <a:pPr/>
-              <a:t>3/21/2024</a:t>
+              <a:t>12/4/2024</a:t>
             </a:fld>
             <a:endParaRPr kumimoji="0" lang="en-US" dirty="0"/>
           </a:p>
@@ -10510,7 +10510,7 @@
                 </a:solidFill>
               </a:rPr>
               <a:pPr/>
-              <a:t>3/21/2024</a:t>
+              <a:t>12/4/2024</a:t>
             </a:fld>
             <a:endParaRPr kumimoji="0" lang="en-US" sz="1200" dirty="0">
               <a:solidFill>
@@ -11118,7 +11118,7 @@
                 <a:tabLst/>
                 <a:defRPr/>
               </a:pPr>
-              <a:t>3/21/2024</a:t>
+              <a:t>12/4/2024</a:t>
             </a:fld>
             <a:endParaRPr kumimoji="0" lang="en-US" sz="1200" b="0" i="0" u="none" strike="noStrike" kern="1200" cap="none" spc="0" normalizeH="0" baseline="0" noProof="0" dirty="0">
               <a:ln>
@@ -13587,7 +13587,7 @@
                 <a:tabLst/>
                 <a:defRPr/>
               </a:pPr>
-              <a:t>3/21/2024</a:t>
+              <a:t>12/4/2024</a:t>
             </a:fld>
             <a:endParaRPr kumimoji="0" lang="en-US" sz="1200" b="0" i="0" u="none" strike="noStrike" kern="1200" cap="none" spc="0" normalizeH="0" baseline="0" noProof="0" dirty="0">
               <a:ln>
@@ -13917,7 +13917,7 @@
                 <a:tabLst/>
                 <a:defRPr/>
               </a:pPr>
-              <a:t>3/21/2024</a:t>
+              <a:t>12/4/2024</a:t>
             </a:fld>
             <a:endParaRPr kumimoji="0" lang="en-US" sz="1200" b="0" i="0" u="none" strike="noStrike" kern="1200" cap="none" spc="0" normalizeH="0" baseline="0" noProof="0" dirty="0">
               <a:ln>
@@ -14988,7 +14988,7 @@
                 <a:tabLst/>
                 <a:defRPr/>
               </a:pPr>
-              <a:t>3/21/2024</a:t>
+              <a:t>12/4/2024</a:t>
             </a:fld>
             <a:endParaRPr kumimoji="0" lang="en-US" sz="1200" b="0" i="0" u="none" strike="noStrike" kern="1200" cap="none" spc="0" normalizeH="0" baseline="0" noProof="0" dirty="0">
               <a:ln>
@@ -16390,7 +16390,7 @@
                 <a:tabLst/>
                 <a:defRPr/>
               </a:pPr>
-              <a:t>3/21/2024</a:t>
+              <a:t>12/4/2024</a:t>
             </a:fld>
             <a:endParaRPr kumimoji="0" lang="en-US" sz="1200" b="0" i="0" u="none" strike="noStrike" kern="1200" cap="none" spc="0" normalizeH="0" baseline="0" noProof="0" dirty="0">
               <a:ln>
@@ -16770,7 +16770,7 @@
                 <a:tabLst/>
                 <a:defRPr/>
               </a:pPr>
-              <a:t>3/21/2024</a:t>
+              <a:t>12/4/2024</a:t>
             </a:fld>
             <a:endParaRPr kumimoji="0" lang="en-US" sz="1200" b="0" i="0" u="none" strike="noStrike" kern="1200" cap="none" spc="0" normalizeH="0" baseline="0" noProof="0" dirty="0">
               <a:ln>
